--- a/Calcium Image Denoising.pptx
+++ b/Calcium Image Denoising.pptx
@@ -985,7 +985,7 @@
   <p:cSld>
     <p:spTree>
       <p:nvGrpSpPr>
-        <p:cNvPr id="105" name="Shape 105"/>
+        <p:cNvPr id="106" name="Shape 106"/>
         <p:cNvGrpSpPr/>
         <p:nvPr/>
       </p:nvGrpSpPr>
@@ -999,7 +999,7 @@
       </p:grpSpPr>
       <p:sp>
         <p:nvSpPr>
-          <p:cNvPr id="106" name="Google Shape;106;p4:notes"/>
+          <p:cNvPr id="107" name="Google Shape;107;p4:notes"/>
           <p:cNvSpPr txBox="1"/>
           <p:nvPr>
             <p:ph idx="1" type="body"/>
@@ -1038,7 +1038,7 @@
       </p:sp>
       <p:sp>
         <p:nvSpPr>
-          <p:cNvPr id="107" name="Google Shape;107;p4:notes"/>
+          <p:cNvPr id="108" name="Google Shape;108;p4:notes"/>
           <p:cNvSpPr/>
           <p:nvPr>
             <p:ph idx="2" type="sldImg"/>
@@ -1084,7 +1084,7 @@
   <p:cSld>
     <p:spTree>
       <p:nvGrpSpPr>
-        <p:cNvPr id="115" name="Shape 115"/>
+        <p:cNvPr id="116" name="Shape 116"/>
         <p:cNvGrpSpPr/>
         <p:nvPr/>
       </p:nvGrpSpPr>
@@ -1098,7 +1098,7 @@
       </p:grpSpPr>
       <p:sp>
         <p:nvSpPr>
-          <p:cNvPr id="116" name="Google Shape;116;p5:notes"/>
+          <p:cNvPr id="117" name="Google Shape;117;p5:notes"/>
           <p:cNvSpPr txBox="1"/>
           <p:nvPr>
             <p:ph idx="1" type="body"/>
@@ -1137,7 +1137,7 @@
       </p:sp>
       <p:sp>
         <p:nvSpPr>
-          <p:cNvPr id="117" name="Google Shape;117;p5:notes"/>
+          <p:cNvPr id="118" name="Google Shape;118;p5:notes"/>
           <p:cNvSpPr/>
           <p:nvPr>
             <p:ph idx="2" type="sldImg"/>
@@ -1183,7 +1183,7 @@
   <p:cSld>
     <p:spTree>
       <p:nvGrpSpPr>
-        <p:cNvPr id="130" name="Shape 130"/>
+        <p:cNvPr id="131" name="Shape 131"/>
         <p:cNvGrpSpPr/>
         <p:nvPr/>
       </p:nvGrpSpPr>
@@ -1197,7 +1197,7 @@
       </p:grpSpPr>
       <p:sp>
         <p:nvSpPr>
-          <p:cNvPr id="131" name="Google Shape;131;p6:notes"/>
+          <p:cNvPr id="132" name="Google Shape;132;p6:notes"/>
           <p:cNvSpPr txBox="1"/>
           <p:nvPr>
             <p:ph idx="1" type="body"/>
@@ -1236,7 +1236,7 @@
       </p:sp>
       <p:sp>
         <p:nvSpPr>
-          <p:cNvPr id="132" name="Google Shape;132;p6:notes"/>
+          <p:cNvPr id="133" name="Google Shape;133;p6:notes"/>
           <p:cNvSpPr/>
           <p:nvPr>
             <p:ph idx="2" type="sldImg"/>
@@ -1282,7 +1282,7 @@
   <p:cSld>
     <p:spTree>
       <p:nvGrpSpPr>
-        <p:cNvPr id="140" name="Shape 140"/>
+        <p:cNvPr id="141" name="Shape 141"/>
         <p:cNvGrpSpPr/>
         <p:nvPr/>
       </p:nvGrpSpPr>
@@ -1296,7 +1296,7 @@
       </p:grpSpPr>
       <p:sp>
         <p:nvSpPr>
-          <p:cNvPr id="141" name="Google Shape;141;p7:notes"/>
+          <p:cNvPr id="142" name="Google Shape;142;p7:notes"/>
           <p:cNvSpPr txBox="1"/>
           <p:nvPr>
             <p:ph idx="1" type="body"/>
@@ -1335,7 +1335,7 @@
       </p:sp>
       <p:sp>
         <p:nvSpPr>
-          <p:cNvPr id="142" name="Google Shape;142;p7:notes"/>
+          <p:cNvPr id="143" name="Google Shape;143;p7:notes"/>
           <p:cNvSpPr/>
           <p:nvPr>
             <p:ph idx="2" type="sldImg"/>
@@ -15646,8 +15646,8 @@
         </p:nvSpPr>
         <p:spPr>
           <a:xfrm>
-            <a:off x="11202120" y="8500680"/>
-            <a:ext cx="7085520" cy="1500480"/>
+            <a:off x="10607745" y="8536680"/>
+            <a:ext cx="7085400" cy="1500600"/>
           </a:xfrm>
           <a:prstGeom prst="rect">
             <a:avLst/>
@@ -16716,6 +16716,37 @@
             </a:endParaRPr>
           </a:p>
           <a:p>
+            <a:pPr indent="-367200" lvl="1" marL="734039" rtl="0" algn="l">
+              <a:lnSpc>
+                <a:spcPct val="139970"/>
+              </a:lnSpc>
+              <a:spcBef>
+                <a:spcPts val="0"/>
+              </a:spcBef>
+              <a:spcAft>
+                <a:spcPts val="0"/>
+              </a:spcAft>
+              <a:buSzPts val="3400"/>
+              <a:buFont typeface="Space Mono"/>
+              <a:buChar char="•"/>
+            </a:pPr>
+            <a:r>
+              <a:rPr lang="en-US" sz="3400">
+                <a:latin typeface="Space Mono"/>
+                <a:ea typeface="Space Mono"/>
+                <a:cs typeface="Space Mono"/>
+                <a:sym typeface="Space Mono"/>
+              </a:rPr>
+              <a:t>Arhitectura: </a:t>
+            </a:r>
+            <a:endParaRPr sz="3400">
+              <a:latin typeface="Space Mono"/>
+              <a:ea typeface="Space Mono"/>
+              <a:cs typeface="Space Mono"/>
+              <a:sym typeface="Space Mono"/>
+            </a:endParaRPr>
+          </a:p>
+          <a:p>
             <a:pPr indent="0" lvl="0" marL="0" marR="0" rtl="0" algn="l">
               <a:lnSpc>
                 <a:spcPct val="139970"/>
@@ -16871,6 +16902,34 @@
           </a:ln>
         </p:spPr>
       </p:pic>
+      <p:pic>
+        <p:nvPicPr>
+          <p:cNvPr id="105" name="Google Shape;105;p15" title="Arhitect.drawio.png"/>
+          <p:cNvPicPr preferRelativeResize="0"/>
+          <p:nvPr/>
+        </p:nvPicPr>
+        <p:blipFill>
+          <a:blip r:embed="rId5">
+            <a:alphaModFix/>
+          </a:blip>
+          <a:stretch>
+            <a:fillRect/>
+          </a:stretch>
+        </p:blipFill>
+        <p:spPr>
+          <a:xfrm>
+            <a:off x="1657555" y="5004830"/>
+            <a:ext cx="15364949" cy="4736775"/>
+          </a:xfrm>
+          <a:prstGeom prst="rect">
+            <a:avLst/>
+          </a:prstGeom>
+          <a:noFill/>
+          <a:ln>
+            <a:noFill/>
+          </a:ln>
+        </p:spPr>
+      </p:pic>
     </p:spTree>
   </p:cSld>
   <p:clrMapOvr>
@@ -16884,7 +16943,7 @@
   <p:cSld>
     <p:spTree>
       <p:nvGrpSpPr>
-        <p:cNvPr id="108" name="Shape 108"/>
+        <p:cNvPr id="109" name="Shape 109"/>
         <p:cNvGrpSpPr/>
         <p:nvPr/>
       </p:nvGrpSpPr>
@@ -16898,7 +16957,7 @@
       </p:grpSpPr>
       <p:sp>
         <p:nvSpPr>
-          <p:cNvPr id="109" name="Google Shape;109;p16"/>
+          <p:cNvPr id="110" name="Google Shape;110;p16"/>
           <p:cNvSpPr/>
           <p:nvPr/>
         </p:nvSpPr>
@@ -16974,7 +17033,7 @@
       </p:sp>
       <p:sp>
         <p:nvSpPr>
-          <p:cNvPr id="110" name="Google Shape;110;p16"/>
+          <p:cNvPr id="111" name="Google Shape;111;p16"/>
           <p:cNvSpPr/>
           <p:nvPr/>
         </p:nvSpPr>
@@ -17061,7 +17120,7 @@
       </p:sp>
       <p:sp>
         <p:nvSpPr>
-          <p:cNvPr id="111" name="Google Shape;111;p16"/>
+          <p:cNvPr id="112" name="Google Shape;112;p16"/>
           <p:cNvSpPr/>
           <p:nvPr/>
         </p:nvSpPr>
@@ -17122,7 +17181,7 @@
       </p:sp>
       <p:sp>
         <p:nvSpPr>
-          <p:cNvPr id="112" name="Google Shape;112;p16"/>
+          <p:cNvPr id="113" name="Google Shape;113;p16"/>
           <p:cNvSpPr/>
           <p:nvPr/>
         </p:nvSpPr>
@@ -17183,7 +17242,7 @@
       </p:sp>
       <p:sp>
         <p:nvSpPr>
-          <p:cNvPr id="113" name="Google Shape;113;p16"/>
+          <p:cNvPr id="114" name="Google Shape;114;p16"/>
           <p:cNvSpPr/>
           <p:nvPr/>
         </p:nvSpPr>
@@ -17206,7 +17265,7 @@
           </a:bodyPr>
           <a:lstStyle/>
           <a:p>
-            <a:pPr indent="-367200" lvl="1" marL="734039" marR="0" rtl="0" algn="l">
+            <a:pPr indent="-392600" lvl="1" marL="734039" marR="0" rtl="0" algn="l">
               <a:lnSpc>
                 <a:spcPct val="139970"/>
               </a:lnSpc>
@@ -17219,12 +17278,12 @@
               <a:buClr>
                 <a:srgbClr val="000000"/>
               </a:buClr>
-              <a:buSzPts val="3400"/>
+              <a:buSzPts val="3800"/>
               <a:buFont typeface="Arial"/>
               <a:buChar char="•"/>
             </a:pPr>
             <a:r>
-              <a:rPr b="1" i="0" lang="en-US" sz="3400" u="none" cap="none" strike="noStrike">
+              <a:rPr b="1" i="0" lang="en-US" sz="3800" u="none" cap="none" strike="noStrike">
                 <a:solidFill>
                   <a:srgbClr val="000000"/>
                 </a:solidFill>
@@ -17236,7 +17295,7 @@
               <a:t>Metodologia de evaluare: </a:t>
             </a:r>
             <a:r>
-              <a:rPr lang="en-US" sz="3400">
+              <a:rPr lang="en-US" sz="3800">
                 <a:latin typeface="Space Mono"/>
                 <a:ea typeface="Space Mono"/>
                 <a:cs typeface="Space Mono"/>
@@ -17244,7 +17303,7 @@
               </a:rPr>
               <a:t>Functia de pierdere si SNR (Signal to noise ratio)</a:t>
             </a:r>
-            <a:endParaRPr b="0" i="0" sz="3400" u="none" cap="none" strike="noStrike">
+            <a:endParaRPr b="0" i="0" sz="3800" u="none" cap="none" strike="noStrike">
               <a:solidFill>
                 <a:srgbClr val="000000"/>
               </a:solidFill>
@@ -17255,7 +17314,7 @@
             </a:endParaRPr>
           </a:p>
           <a:p>
-            <a:pPr indent="-367200" lvl="1" marL="734039" marR="0" rtl="0" algn="l">
+            <a:pPr indent="-392600" lvl="1" marL="734039" marR="0" rtl="0" algn="l">
               <a:lnSpc>
                 <a:spcPct val="139970"/>
               </a:lnSpc>
@@ -17268,12 +17327,12 @@
               <a:buClr>
                 <a:srgbClr val="000000"/>
               </a:buClr>
-              <a:buSzPts val="3400"/>
+              <a:buSzPts val="3800"/>
               <a:buFont typeface="Arial"/>
               <a:buChar char="•"/>
             </a:pPr>
             <a:r>
-              <a:rPr b="1" i="0" lang="en-US" sz="3400" u="none" cap="none" strike="noStrike">
+              <a:rPr b="1" i="0" lang="en-US" sz="3800" u="none" cap="none" strike="noStrike">
                 <a:solidFill>
                   <a:srgbClr val="000000"/>
                 </a:solidFill>
@@ -17285,7 +17344,7 @@
               <a:t>Setul de date:</a:t>
             </a:r>
             <a:r>
-              <a:rPr b="1" lang="en-US" sz="3400" u="sng">
+              <a:rPr b="1" lang="en-US" sz="3800" u="sng">
                 <a:solidFill>
                   <a:schemeClr val="hlink"/>
                 </a:solidFill>
@@ -17298,7 +17357,7 @@
               <a:t>Set date</a:t>
             </a:r>
             <a:r>
-              <a:rPr b="0" i="0" lang="en-US" sz="3400" u="none" cap="none" strike="noStrike">
+              <a:rPr b="0" i="0" lang="en-US" sz="3800" u="none" cap="none" strike="noStrike">
                 <a:solidFill>
                   <a:srgbClr val="000000"/>
                 </a:solidFill>
@@ -17310,7 +17369,7 @@
               <a:t>. L-am folosit deoarece </a:t>
             </a:r>
             <a:r>
-              <a:rPr lang="en-US" sz="3400">
+              <a:rPr lang="en-US" sz="3800">
                 <a:latin typeface="Space Mono"/>
                 <a:ea typeface="Space Mono"/>
                 <a:cs typeface="Space Mono"/>
@@ -17318,7 +17377,7 @@
               </a:rPr>
               <a:t>este folosita de DeepCad, cea mai citata lucrare din domeniu si are 6000 de slide-uri, fara de alte seturi de date (cu 1500)</a:t>
             </a:r>
-            <a:endParaRPr sz="3400">
+            <a:endParaRPr sz="3800">
               <a:latin typeface="Space Mono"/>
               <a:ea typeface="Space Mono"/>
               <a:cs typeface="Space Mono"/>
@@ -17326,7 +17385,7 @@
             </a:endParaRPr>
           </a:p>
           <a:p>
-            <a:pPr indent="-367200" lvl="1" marL="734039" marR="0" rtl="0" algn="l">
+            <a:pPr indent="-392600" lvl="1" marL="734039" marR="0" rtl="0" algn="l">
               <a:lnSpc>
                 <a:spcPct val="139970"/>
               </a:lnSpc>
@@ -17339,12 +17398,12 @@
               <a:buClr>
                 <a:srgbClr val="000000"/>
               </a:buClr>
-              <a:buSzPts val="3400"/>
+              <a:buSzPts val="3800"/>
               <a:buFont typeface="Arial"/>
               <a:buChar char="•"/>
             </a:pPr>
             <a:r>
-              <a:rPr b="1" i="0" lang="en-US" sz="3400" u="none" cap="none" strike="noStrike">
+              <a:rPr b="1" i="0" lang="en-US" sz="3800" u="none" cap="none" strike="noStrike">
                 <a:solidFill>
                   <a:srgbClr val="000000"/>
                 </a:solidFill>
@@ -17356,7 +17415,7 @@
               <a:t>Exemple de cazuri de test:</a:t>
             </a:r>
             <a:r>
-              <a:rPr b="0" i="0" lang="en-US" sz="3400" u="none" cap="none" strike="noStrike">
+              <a:rPr b="0" i="0" lang="en-US" sz="3800" u="none" cap="none" strike="noStrike">
                 <a:solidFill>
                   <a:srgbClr val="000000"/>
                 </a:solidFill>
@@ -17368,52 +17427,23 @@
               <a:t> </a:t>
             </a:r>
             <a:r>
-              <a:rPr lang="en-US" sz="3400">
+              <a:rPr lang="en-US" sz="3800">
                 <a:latin typeface="Space Mono"/>
                 <a:ea typeface="Space Mono"/>
                 <a:cs typeface="Space Mono"/>
                 <a:sym typeface="Space Mono"/>
               </a:rPr>
-              <a:t>Am creat un script pentru a calcula </a:t>
-            </a:r>
-            <a:endParaRPr sz="3400">
-              <a:latin typeface="Space Mono"/>
-              <a:ea typeface="Space Mono"/>
-              <a:cs typeface="Space Mono"/>
-              <a:sym typeface="Space Mono"/>
-            </a:endParaRPr>
-          </a:p>
-          <a:p>
-            <a:pPr indent="0" lvl="0" marL="914400" marR="0" rtl="0" algn="l">
-              <a:lnSpc>
-                <a:spcPct val="139970"/>
-              </a:lnSpc>
-              <a:spcBef>
-                <a:spcPts val="0"/>
-              </a:spcBef>
-              <a:spcAft>
-                <a:spcPts val="0"/>
-              </a:spcAft>
-              <a:buNone/>
-            </a:pPr>
-            <a:r>
-              <a:rPr lang="en-US" sz="3400">
-                <a:latin typeface="Space Mono"/>
-                <a:ea typeface="Space Mono"/>
-                <a:cs typeface="Space Mono"/>
-                <a:sym typeface="Space Mono"/>
-              </a:rPr>
-              <a:t>SNR-ul inainte si dupa antrenare</a:t>
+              <a:t>Am creat un script pentru a calcula SNR-ul inainte si dupa antrenare</a:t>
             </a:r>
             <a:br>
-              <a:rPr lang="en-US" sz="3400">
+              <a:rPr lang="en-US" sz="3800">
                 <a:latin typeface="Space Mono"/>
                 <a:ea typeface="Space Mono"/>
                 <a:cs typeface="Space Mono"/>
                 <a:sym typeface="Space Mono"/>
               </a:rPr>
             </a:br>
-            <a:endParaRPr sz="3400">
+            <a:endParaRPr sz="3800">
               <a:latin typeface="Space Mono"/>
               <a:ea typeface="Space Mono"/>
               <a:cs typeface="Space Mono"/>
@@ -17640,7 +17670,7 @@
       </p:sp>
       <p:pic>
         <p:nvPicPr>
-          <p:cNvPr id="114" name="Google Shape;114;p16"/>
+          <p:cNvPr id="115" name="Google Shape;115;p16"/>
           <p:cNvPicPr preferRelativeResize="0"/>
           <p:nvPr/>
         </p:nvPicPr>
@@ -17678,7 +17708,7 @@
   <p:cSld>
     <p:spTree>
       <p:nvGrpSpPr>
-        <p:cNvPr id="118" name="Shape 118"/>
+        <p:cNvPr id="119" name="Shape 119"/>
         <p:cNvGrpSpPr/>
         <p:nvPr/>
       </p:nvGrpSpPr>
@@ -17692,7 +17722,7 @@
       </p:grpSpPr>
       <p:sp>
         <p:nvSpPr>
-          <p:cNvPr id="119" name="Google Shape;119;p17"/>
+          <p:cNvPr id="120" name="Google Shape;120;p17"/>
           <p:cNvSpPr/>
           <p:nvPr/>
         </p:nvSpPr>
@@ -17768,7 +17798,7 @@
       </p:sp>
       <p:sp>
         <p:nvSpPr>
-          <p:cNvPr id="120" name="Google Shape;120;p17"/>
+          <p:cNvPr id="121" name="Google Shape;121;p17"/>
           <p:cNvSpPr/>
           <p:nvPr/>
         </p:nvSpPr>
@@ -17855,7 +17885,7 @@
       </p:sp>
       <p:sp>
         <p:nvSpPr>
-          <p:cNvPr id="121" name="Google Shape;121;p17"/>
+          <p:cNvPr id="122" name="Google Shape;122;p17"/>
           <p:cNvSpPr/>
           <p:nvPr/>
         </p:nvSpPr>
@@ -17916,7 +17946,7 @@
       </p:sp>
       <p:sp>
         <p:nvSpPr>
-          <p:cNvPr id="122" name="Google Shape;122;p17"/>
+          <p:cNvPr id="123" name="Google Shape;123;p17"/>
           <p:cNvSpPr/>
           <p:nvPr/>
         </p:nvSpPr>
@@ -17977,7 +18007,7 @@
       </p:sp>
       <p:sp>
         <p:nvSpPr>
-          <p:cNvPr id="123" name="Google Shape;123;p17"/>
+          <p:cNvPr id="124" name="Google Shape;124;p17"/>
           <p:cNvSpPr/>
           <p:nvPr/>
         </p:nvSpPr>
@@ -18167,7 +18197,7 @@
       </p:sp>
       <p:pic>
         <p:nvPicPr>
-          <p:cNvPr id="124" name="Google Shape;124;p17"/>
+          <p:cNvPr id="125" name="Google Shape;125;p17"/>
           <p:cNvPicPr preferRelativeResize="0"/>
           <p:nvPr/>
         </p:nvPicPr>
@@ -18194,7 +18224,7 @@
       </p:pic>
       <p:pic>
         <p:nvPicPr>
-          <p:cNvPr id="125" name="Google Shape;125;p17" title="noised.png"/>
+          <p:cNvPr id="126" name="Google Shape;126;p17" title="noised.png"/>
           <p:cNvPicPr preferRelativeResize="0"/>
           <p:nvPr/>
         </p:nvPicPr>
@@ -18222,7 +18252,7 @@
       </p:pic>
       <p:pic>
         <p:nvPicPr>
-          <p:cNvPr id="126" name="Google Shape;126;p17" title="denoised.png"/>
+          <p:cNvPr id="127" name="Google Shape;127;p17" title="denoised.png"/>
           <p:cNvPicPr preferRelativeResize="0"/>
           <p:nvPr/>
         </p:nvPicPr>
@@ -18250,7 +18280,7 @@
       </p:pic>
       <p:sp>
         <p:nvSpPr>
-          <p:cNvPr id="127" name="Google Shape;127;p17"/>
+          <p:cNvPr id="128" name="Google Shape;128;p17"/>
           <p:cNvSpPr txBox="1"/>
           <p:nvPr/>
         </p:nvSpPr>
@@ -18291,7 +18321,7 @@
       </p:sp>
       <p:sp>
         <p:nvSpPr>
-          <p:cNvPr id="128" name="Google Shape;128;p17"/>
+          <p:cNvPr id="129" name="Google Shape;129;p17"/>
           <p:cNvSpPr/>
           <p:nvPr/>
         </p:nvSpPr>
@@ -18352,7 +18382,7 @@
       </p:sp>
       <p:sp>
         <p:nvSpPr>
-          <p:cNvPr id="129" name="Google Shape;129;p17"/>
+          <p:cNvPr id="130" name="Google Shape;130;p17"/>
           <p:cNvSpPr/>
           <p:nvPr/>
         </p:nvSpPr>
@@ -18424,7 +18454,7 @@
   <p:cSld>
     <p:spTree>
       <p:nvGrpSpPr>
-        <p:cNvPr id="133" name="Shape 133"/>
+        <p:cNvPr id="134" name="Shape 134"/>
         <p:cNvGrpSpPr/>
         <p:nvPr/>
       </p:nvGrpSpPr>
@@ -18438,7 +18468,7 @@
       </p:grpSpPr>
       <p:sp>
         <p:nvSpPr>
-          <p:cNvPr id="134" name="Google Shape;134;p18"/>
+          <p:cNvPr id="135" name="Google Shape;135;p18"/>
           <p:cNvSpPr/>
           <p:nvPr/>
         </p:nvSpPr>
@@ -18514,7 +18544,7 @@
       </p:sp>
       <p:sp>
         <p:nvSpPr>
-          <p:cNvPr id="135" name="Google Shape;135;p18"/>
+          <p:cNvPr id="136" name="Google Shape;136;p18"/>
           <p:cNvSpPr/>
           <p:nvPr/>
         </p:nvSpPr>
@@ -18601,7 +18631,7 @@
       </p:sp>
       <p:sp>
         <p:nvSpPr>
-          <p:cNvPr id="136" name="Google Shape;136;p18"/>
+          <p:cNvPr id="137" name="Google Shape;137;p18"/>
           <p:cNvSpPr/>
           <p:nvPr/>
         </p:nvSpPr>
@@ -18662,7 +18692,7 @@
       </p:sp>
       <p:sp>
         <p:nvSpPr>
-          <p:cNvPr id="137" name="Google Shape;137;p18"/>
+          <p:cNvPr id="138" name="Google Shape;138;p18"/>
           <p:cNvSpPr/>
           <p:nvPr/>
         </p:nvSpPr>
@@ -18723,7 +18753,7 @@
       </p:sp>
       <p:sp>
         <p:nvSpPr>
-          <p:cNvPr id="138" name="Google Shape;138;p18"/>
+          <p:cNvPr id="139" name="Google Shape;139;p18"/>
           <p:cNvSpPr/>
           <p:nvPr/>
         </p:nvSpPr>
@@ -18746,7 +18776,7 @@
           </a:bodyPr>
           <a:lstStyle/>
           <a:p>
-            <a:pPr indent="-367200" lvl="1" marL="734039" marR="0" rtl="0" algn="l">
+            <a:pPr indent="-379900" lvl="1" marL="734039" marR="0" rtl="0" algn="l">
               <a:lnSpc>
                 <a:spcPct val="139970"/>
               </a:lnSpc>
@@ -18759,12 +18789,12 @@
               <a:buClr>
                 <a:srgbClr val="000000"/>
               </a:buClr>
-              <a:buSzPts val="3400"/>
+              <a:buSzPts val="3600"/>
               <a:buFont typeface="Arial"/>
               <a:buChar char="•"/>
             </a:pPr>
             <a:r>
-              <a:rPr b="1" i="0" lang="en-US" sz="3400" u="none" cap="none" strike="noStrike">
+              <a:rPr b="1" i="0" lang="en-US" sz="3600" u="none" cap="none" strike="noStrike">
                 <a:solidFill>
                   <a:srgbClr val="000000"/>
                 </a:solidFill>
@@ -18776,7 +18806,7 @@
               <a:t>Rezumatul progresului: </a:t>
             </a:r>
             <a:r>
-              <a:rPr lang="en-US" sz="3400">
+              <a:rPr lang="en-US" sz="3600">
                 <a:latin typeface="Space Mono"/>
                 <a:ea typeface="Space Mono"/>
                 <a:cs typeface="Space Mono"/>
@@ -18784,7 +18814,7 @@
               </a:rPr>
               <a:t>Am reusit sa dublam valoarea SNR-ului </a:t>
             </a:r>
-            <a:endParaRPr sz="3400">
+            <a:endParaRPr sz="3600">
               <a:latin typeface="Space Mono"/>
               <a:ea typeface="Space Mono"/>
               <a:cs typeface="Space Mono"/>
@@ -18805,7 +18835,7 @@
               <a:buNone/>
             </a:pPr>
             <a:r>
-              <a:rPr lang="en-US" sz="3400">
+              <a:rPr lang="en-US" sz="3600">
                 <a:latin typeface="Space Mono"/>
                 <a:ea typeface="Space Mono"/>
                 <a:cs typeface="Space Mono"/>
@@ -18813,7 +18843,7 @@
               </a:rPr>
               <a:t>SNR pentru intrare: 25.45 dB</a:t>
             </a:r>
-            <a:endParaRPr sz="3400">
+            <a:endParaRPr sz="3600">
               <a:latin typeface="Space Mono"/>
               <a:ea typeface="Space Mono"/>
               <a:cs typeface="Space Mono"/>
@@ -18834,7 +18864,7 @@
               <a:buNone/>
             </a:pPr>
             <a:r>
-              <a:rPr lang="en-US" sz="3400">
+              <a:rPr lang="en-US" sz="3600">
                 <a:latin typeface="Space Mono"/>
                 <a:ea typeface="Space Mono"/>
                 <a:cs typeface="Space Mono"/>
@@ -18842,7 +18872,7 @@
               </a:rPr>
               <a:t>SNR pentru resultat: 43.51 dB</a:t>
             </a:r>
-            <a:endParaRPr sz="3400">
+            <a:endParaRPr sz="3600">
               <a:latin typeface="Space Mono"/>
               <a:ea typeface="Space Mono"/>
               <a:cs typeface="Space Mono"/>
@@ -18850,7 +18880,7 @@
             </a:endParaRPr>
           </a:p>
           <a:p>
-            <a:pPr indent="-367200" lvl="1" marL="734039" marR="0" rtl="0" algn="l">
+            <a:pPr indent="-379900" lvl="1" marL="734039" marR="0" rtl="0" algn="l">
               <a:lnSpc>
                 <a:spcPct val="139970"/>
               </a:lnSpc>
@@ -18863,12 +18893,12 @@
               <a:buClr>
                 <a:srgbClr val="000000"/>
               </a:buClr>
-              <a:buSzPts val="3400"/>
+              <a:buSzPts val="3600"/>
               <a:buFont typeface="Arial"/>
               <a:buChar char="•"/>
             </a:pPr>
             <a:r>
-              <a:rPr b="1" i="0" lang="en-US" sz="3400" u="none" cap="none" strike="noStrike">
+              <a:rPr b="1" i="0" lang="en-US" sz="3600" u="none" cap="none" strike="noStrike">
                 <a:solidFill>
                   <a:srgbClr val="000000"/>
                 </a:solidFill>
@@ -18880,7 +18910,7 @@
               <a:t>Limitările soluției actuale</a:t>
             </a:r>
             <a:r>
-              <a:rPr b="1" lang="en-US" sz="3400">
+              <a:rPr b="1" lang="en-US" sz="3600">
                 <a:latin typeface="Space Mono"/>
                 <a:ea typeface="Space Mono"/>
                 <a:cs typeface="Space Mono"/>
@@ -18889,7 +18919,7 @@
               <a:t>: </a:t>
             </a:r>
             <a:r>
-              <a:rPr lang="en-US" sz="3400">
+              <a:rPr lang="en-US" sz="3600">
                 <a:latin typeface="Space Mono"/>
                 <a:ea typeface="Space Mono"/>
                 <a:cs typeface="Space Mono"/>
@@ -18897,7 +18927,7 @@
               </a:rPr>
               <a:t>Procesarea se face la nivel 2d iar reteaua are foarte putine straturi</a:t>
             </a:r>
-            <a:endParaRPr sz="3400">
+            <a:endParaRPr sz="3600">
               <a:latin typeface="Space Mono"/>
               <a:ea typeface="Space Mono"/>
               <a:cs typeface="Space Mono"/>
@@ -18905,7 +18935,7 @@
             </a:endParaRPr>
           </a:p>
           <a:p>
-            <a:pPr indent="0" lvl="0" marL="914400" marR="0" rtl="0" algn="l">
+            <a:pPr indent="-379899" lvl="1" marL="734040" marR="0" rtl="0" algn="l">
               <a:lnSpc>
                 <a:spcPct val="139970"/>
               </a:lnSpc>
@@ -18915,38 +18945,15 @@
               <a:spcAft>
                 <a:spcPts val="0"/>
               </a:spcAft>
-              <a:buNone/>
-            </a:pPr>
-            <a:r>
-              <a:t/>
-            </a:r>
-            <a:endParaRPr sz="3400">
-              <a:latin typeface="Space Mono"/>
-              <a:ea typeface="Space Mono"/>
-              <a:cs typeface="Space Mono"/>
-              <a:sym typeface="Space Mono"/>
-            </a:endParaRPr>
-          </a:p>
-          <a:p>
-            <a:pPr indent="-367199" lvl="1" marL="734040" marR="0" rtl="0" algn="l">
-              <a:lnSpc>
-                <a:spcPct val="139970"/>
-              </a:lnSpc>
-              <a:spcBef>
-                <a:spcPts val="0"/>
-              </a:spcBef>
-              <a:spcAft>
-                <a:spcPts val="0"/>
-              </a:spcAft>
               <a:buClr>
                 <a:srgbClr val="000000"/>
               </a:buClr>
-              <a:buSzPts val="3400"/>
+              <a:buSzPts val="3600"/>
               <a:buFont typeface="Arial"/>
               <a:buChar char="•"/>
             </a:pPr>
             <a:r>
-              <a:rPr b="1" i="0" lang="en-US" sz="3400" u="none" cap="none" strike="noStrike">
+              <a:rPr b="1" i="0" lang="en-US" sz="3600" u="none" cap="none" strike="noStrike">
                 <a:solidFill>
                   <a:srgbClr val="000000"/>
                 </a:solidFill>
@@ -18958,7 +18965,7 @@
               <a:t>Potențiale îmbunătățiri: </a:t>
             </a:r>
             <a:r>
-              <a:rPr lang="en-US" sz="3400">
+              <a:rPr lang="en-US" sz="3600">
                 <a:latin typeface="Space Mono"/>
                 <a:ea typeface="Space Mono"/>
                 <a:cs typeface="Space Mono"/>
@@ -18966,7 +18973,7 @@
               </a:rPr>
               <a:t>Trecerea de la o retea Unet simpla la o retea de tip Unet 3d si marirea numarului de straturi ascunse ale retelei</a:t>
             </a:r>
-            <a:endParaRPr b="0" i="0" sz="3400" u="none" cap="none" strike="noStrike">
+            <a:endParaRPr b="0" i="0" sz="3600" u="none" cap="none" strike="noStrike">
               <a:solidFill>
                 <a:srgbClr val="000000"/>
               </a:solidFill>
@@ -19084,7 +19091,7 @@
       </p:sp>
       <p:pic>
         <p:nvPicPr>
-          <p:cNvPr id="139" name="Google Shape;139;p18"/>
+          <p:cNvPr id="140" name="Google Shape;140;p18"/>
           <p:cNvPicPr preferRelativeResize="0"/>
           <p:nvPr/>
         </p:nvPicPr>
@@ -19122,7 +19129,7 @@
   <p:cSld>
     <p:spTree>
       <p:nvGrpSpPr>
-        <p:cNvPr id="143" name="Shape 143"/>
+        <p:cNvPr id="144" name="Shape 144"/>
         <p:cNvGrpSpPr/>
         <p:nvPr/>
       </p:nvGrpSpPr>
@@ -19136,7 +19143,7 @@
       </p:grpSpPr>
       <p:sp>
         <p:nvSpPr>
-          <p:cNvPr id="144" name="Google Shape;144;p19"/>
+          <p:cNvPr id="145" name="Google Shape;145;p19"/>
           <p:cNvSpPr/>
           <p:nvPr/>
         </p:nvSpPr>
@@ -19212,7 +19219,7 @@
       </p:sp>
       <p:sp>
         <p:nvSpPr>
-          <p:cNvPr id="145" name="Google Shape;145;p19"/>
+          <p:cNvPr id="146" name="Google Shape;146;p19"/>
           <p:cNvSpPr/>
           <p:nvPr/>
         </p:nvSpPr>
@@ -19299,7 +19306,7 @@
       </p:sp>
       <p:sp>
         <p:nvSpPr>
-          <p:cNvPr id="146" name="Google Shape;146;p19"/>
+          <p:cNvPr id="147" name="Google Shape;147;p19"/>
           <p:cNvSpPr/>
           <p:nvPr/>
         </p:nvSpPr>
@@ -19360,7 +19367,7 @@
       </p:sp>
       <p:sp>
         <p:nvSpPr>
-          <p:cNvPr id="147" name="Google Shape;147;p19"/>
+          <p:cNvPr id="148" name="Google Shape;148;p19"/>
           <p:cNvSpPr/>
           <p:nvPr/>
         </p:nvSpPr>
@@ -19421,7 +19428,7 @@
       </p:sp>
       <p:sp>
         <p:nvSpPr>
-          <p:cNvPr id="148" name="Google Shape;148;p19"/>
+          <p:cNvPr id="149" name="Google Shape;149;p19"/>
           <p:cNvSpPr/>
           <p:nvPr/>
         </p:nvSpPr>
@@ -19444,7 +19451,7 @@
           </a:bodyPr>
           <a:lstStyle/>
           <a:p>
-            <a:pPr indent="-367199" lvl="1" marL="734040" marR="0" rtl="0" algn="l">
+            <a:pPr indent="-360849" lvl="1" marL="734040" marR="0" rtl="0" algn="l">
               <a:lnSpc>
                 <a:spcPct val="139970"/>
               </a:lnSpc>
@@ -19457,12 +19464,12 @@
               <a:buClr>
                 <a:srgbClr val="000000"/>
               </a:buClr>
-              <a:buSzPts val="3400"/>
+              <a:buSzPts val="3300"/>
               <a:buFont typeface="Arial"/>
               <a:buChar char="•"/>
             </a:pPr>
             <a:r>
-              <a:rPr b="1" i="0" lang="en-US" sz="3400" u="none" cap="none" strike="noStrike">
+              <a:rPr b="1" i="0" lang="en-US" sz="3300" u="none" cap="none" strike="noStrike">
                 <a:solidFill>
                   <a:srgbClr val="000000"/>
                 </a:solidFill>
@@ -19474,7 +19481,7 @@
               <a:t>Pași următori:</a:t>
             </a:r>
             <a:r>
-              <a:rPr b="1" i="0" lang="en-US" sz="3400" u="none" cap="none" strike="noStrike">
+              <a:rPr b="1" i="0" lang="en-US" sz="3300" u="none" cap="none" strike="noStrike">
                 <a:solidFill>
                   <a:srgbClr val="000000"/>
                 </a:solidFill>
@@ -19486,7 +19493,7 @@
               <a:t> T</a:t>
             </a:r>
             <a:r>
-              <a:rPr i="0" lang="en-US" sz="3400" u="none" cap="none" strike="noStrike">
+              <a:rPr i="0" lang="en-US" sz="3300" u="none" cap="none" strike="noStrike">
                 <a:solidFill>
                   <a:srgbClr val="000000"/>
                 </a:solidFill>
@@ -19498,7 +19505,7 @@
               <a:t>recere la </a:t>
             </a:r>
             <a:r>
-              <a:rPr lang="en-US" sz="3400">
+              <a:rPr lang="en-US" sz="3300">
                 <a:latin typeface="Space Mono"/>
                 <a:ea typeface="Space Mono"/>
                 <a:cs typeface="Space Mono"/>
@@ -19506,7 +19513,7 @@
               </a:rPr>
               <a:t>Unet 3d si modificarea retelei</a:t>
             </a:r>
-            <a:endParaRPr b="0" i="0" sz="3400" u="none" cap="none" strike="noStrike">
+            <a:endParaRPr b="0" i="0" sz="3300" u="none" cap="none" strike="noStrike">
               <a:solidFill>
                 <a:srgbClr val="000000"/>
               </a:solidFill>
@@ -19517,7 +19524,7 @@
             </a:endParaRPr>
           </a:p>
           <a:p>
-            <a:pPr indent="-367200" lvl="1" marL="734039" marR="0" rtl="0" algn="l">
+            <a:pPr indent="-360850" lvl="1" marL="734039" marR="0" rtl="0" algn="l">
               <a:lnSpc>
                 <a:spcPct val="139970"/>
               </a:lnSpc>
@@ -19530,12 +19537,12 @@
               <a:buClr>
                 <a:srgbClr val="000000"/>
               </a:buClr>
-              <a:buSzPts val="3400"/>
+              <a:buSzPts val="3300"/>
               <a:buFont typeface="Arial"/>
               <a:buChar char="•"/>
             </a:pPr>
             <a:r>
-              <a:rPr b="1" i="0" lang="en-US" sz="3400" u="none" cap="none" strike="noStrike">
+              <a:rPr b="1" i="0" lang="en-US" sz="3300" u="none" cap="none" strike="noStrike">
                 <a:solidFill>
                   <a:srgbClr val="000000"/>
                 </a:solidFill>
@@ -19547,7 +19554,7 @@
               <a:t>Plan de implementare: </a:t>
             </a:r>
             <a:r>
-              <a:rPr lang="en-US" sz="3400">
+              <a:rPr lang="en-US" sz="3300">
                 <a:solidFill>
                   <a:schemeClr val="dk1"/>
                 </a:solidFill>
@@ -19558,7 +19565,7 @@
               </a:rPr>
               <a:t>Modificarea clasei DenoiseNet pentru a trece la o arhitectura 3d si a creste numarul de straturi</a:t>
             </a:r>
-            <a:endParaRPr sz="3400">
+            <a:endParaRPr sz="3300">
               <a:solidFill>
                 <a:schemeClr val="dk1"/>
               </a:solidFill>
@@ -19569,7 +19576,7 @@
             </a:endParaRPr>
           </a:p>
           <a:p>
-            <a:pPr indent="-367200" lvl="1" marL="734039" marR="0" rtl="0" algn="l">
+            <a:pPr indent="-360850" lvl="1" marL="734039" marR="0" rtl="0" algn="l">
               <a:lnSpc>
                 <a:spcPct val="139970"/>
               </a:lnSpc>
@@ -19582,12 +19589,12 @@
               <a:buClr>
                 <a:srgbClr val="000000"/>
               </a:buClr>
-              <a:buSzPts val="3400"/>
+              <a:buSzPts val="3300"/>
               <a:buFont typeface="Arial"/>
               <a:buChar char="•"/>
             </a:pPr>
             <a:r>
-              <a:rPr b="1" i="0" lang="en-US" sz="3400" u="none" cap="none" strike="noStrike">
+              <a:rPr b="1" i="0" lang="en-US" sz="3300" u="none" cap="none" strike="noStrike">
                 <a:solidFill>
                   <a:srgbClr val="000000"/>
                 </a:solidFill>
@@ -19598,7 +19605,7 @@
               </a:rPr>
               <a:t>Obiectivele finale: </a:t>
             </a:r>
-            <a:endParaRPr b="1" i="0" sz="3400" u="none" cap="none" strike="noStrike">
+            <a:endParaRPr b="1" i="0" sz="3300" u="none" cap="none" strike="noStrike">
               <a:solidFill>
                 <a:srgbClr val="000000"/>
               </a:solidFill>
@@ -19622,7 +19629,7 @@
               <a:buNone/>
             </a:pPr>
             <a:r>
-              <a:rPr b="1" lang="en-US" sz="2900">
+              <a:rPr b="1" lang="en-US" sz="3300">
                 <a:solidFill>
                   <a:schemeClr val="dk1"/>
                 </a:solidFill>
@@ -19634,7 +19641,7 @@
               <a:t>M</a:t>
             </a:r>
             <a:r>
-              <a:rPr b="1" lang="en-US" sz="2900">
+              <a:rPr b="1" lang="en-US" sz="3300">
                 <a:solidFill>
                   <a:schemeClr val="dk1"/>
                 </a:solidFill>
@@ -19646,7 +19653,7 @@
               <a:t>aximizarea SNR-ului:</a:t>
             </a:r>
             <a:r>
-              <a:rPr lang="en-US" sz="2900">
+              <a:rPr lang="en-US" sz="3300">
                 <a:solidFill>
                   <a:schemeClr val="dk1"/>
                 </a:solidFill>
@@ -19657,7 +19664,7 @@
               </a:rPr>
               <a:t> Depășirea pragului actual de 43.51 dB prin reducerea zgomotului rezidual care nu a putut fi eliminat prin procesare exclusiv spațială (2D).</a:t>
             </a:r>
-            <a:endParaRPr sz="2900">
+            <a:endParaRPr sz="3300">
               <a:solidFill>
                 <a:schemeClr val="dk1"/>
               </a:solidFill>
@@ -19681,7 +19688,7 @@
               <a:buNone/>
             </a:pPr>
             <a:r>
-              <a:rPr b="1" lang="en-US" sz="2900">
+              <a:rPr b="1" lang="en-US" sz="3300">
                 <a:solidFill>
                   <a:schemeClr val="dk1"/>
                 </a:solidFill>
@@ -19693,7 +19700,7 @@
               <a:t>Consistență Temporală:</a:t>
             </a:r>
             <a:r>
-              <a:rPr lang="en-US" sz="2900">
+              <a:rPr lang="en-US" sz="3300">
                 <a:solidFill>
                   <a:schemeClr val="dk1"/>
                 </a:solidFill>
@@ -19704,7 +19711,7 @@
               </a:rPr>
               <a:t> Eliminarea fluctuațiilor de zgomot dintre cadre (flickering), rezultând in imagini care păstrează dinamica naturală a semnalului de calciu</a:t>
             </a:r>
-            <a:endParaRPr sz="5000">
+            <a:endParaRPr sz="3300">
               <a:latin typeface="Space Mono"/>
               <a:ea typeface="Space Mono"/>
               <a:cs typeface="Space Mono"/>
@@ -19741,7 +19748,7 @@
       </p:sp>
       <p:pic>
         <p:nvPicPr>
-          <p:cNvPr id="149" name="Google Shape;149;p19"/>
+          <p:cNvPr id="150" name="Google Shape;150;p19"/>
           <p:cNvPicPr preferRelativeResize="0"/>
           <p:nvPr/>
         </p:nvPicPr>

--- a/Calcium Image Denoising.pptx
+++ b/Calcium Image Denoising.pptx
@@ -15434,7 +15434,7 @@
         <p:spPr>
           <a:xfrm>
             <a:off x="0" y="0"/>
-            <a:ext cx="18287640" cy="10286640"/>
+            <a:ext cx="18882360" cy="10287000"/>
           </a:xfrm>
           <a:custGeom>
             <a:rect b="b" l="l" r="r" t="t"/>
@@ -17375,7 +17375,7 @@
                 <a:cs typeface="Space Mono"/>
                 <a:sym typeface="Space Mono"/>
               </a:rPr>
-              <a:t>este folosita de DeepCad, cea mai citata lucrare din domeniu si are 6000 de slide-uri, fara de alte seturi de date (cu 1500)</a:t>
+              <a:t>este folosita de DeepCad, cea mai citata lucrare din domeniu si are 6000 de slide-uri, fata de alte seturi de date (cu 1500)</a:t>
             </a:r>
             <a:endParaRPr sz="3800">
               <a:latin typeface="Space Mono"/>
